--- a/docs/unit19/teacher/Unit19-Computer-Networking-Teacher-Deck.pptx
+++ b/docs/unit19/teacher/Unit19-Computer-Networking-Teacher-Deck.pptx
@@ -805,7 +805,8 @@
               <a:rPr lang="en-US" dirty="0"/>
               <a:t>A.D1 needs benefits AND drawbacks for all three models, tested against the four factors, each backed by a realistic example, leading to a justified conclusion.
 Model the difference between describing and evaluating with one worked paragraph using a different client (not the assignment wording).
-Support: sentence stems (because… therefore… however…). Stretch: hybrid models, e.g. client/server plus cloud SaaS.</a:t>
+Support: sentence stems (because… therefore… however…). Stretch: hybrid models, e.g. client/server plus cloud SaaS.
+Video (lesson A1c): What is a thin client? Use it before the thin-client discussion.</a:t>
             </a:r>
             <a:endParaRPr lang="en-US" dirty="0"/>
           </a:p>
@@ -896,7 +897,8 @@
               <a:t>Show the cloud responsibility chart: the further right, the less the customer manages.
 Ask: what is the noisy neighbour problem in public cloud?
 Link BYOD to Cyber Essentials (employer feedback on the brief) and to guest VLANs later in B1.
-Homework: Assignment 1 trends section research.</a:t>
+Homework: Assignment 1 trends section research.
+Videos (lesson A1d): Cisco Internet of Everything: Circle Story (1 min starter), AWS What is cloud computing?, Cloud computing in 6 minutes, What is SDN?, Intro to SAN technologies.</a:t>
             </a:r>
             <a:endParaRPr lang="en-US" dirty="0"/>
           </a:p>
@@ -1167,7 +1169,8 @@
               <a:t>Teach the purpose of layering: modular design, interoperability, troubleshooting.
 Map devices to layers: hub/cable (1), switch (2), router (3); ports at layer 4.
 TCP vs UDP: handshake, acknowledgements, re-sending vs speed.
-Stretch: why the session and presentation functions sit inside the TCP/IP application layer.</a:t>
+Stretch: why the session and presentation functions sit inside the TCP/IP application layer.
+Video (lesson A3): Warriors of the Net, Ericsson (12:57). Show in full; pause at the router, switch and firewall scenes and ask which OSI layer each works at.</a:t>
             </a:r>
             <a:endParaRPr lang="en-US" dirty="0"/>
           </a:p>
@@ -1706,7 +1709,8 @@
               <a:rPr lang="en-US" dirty="0"/>
               <a:t>Use the dental practice example on the Learn page (a different client from the assignment).
 Discuss trade-offs explicitly: redundancy costs money; security affects ease of use.
-Stretch: failure domains and link aggregation (EtherChannel) in hierarchical designs.</a:t>
+Stretch: failure domains and link aggregation (EtherChannel) in hierarchical designs.
+Video (lesson B1a): Port of Long Beach automated container terminal, with the VectorUSA and Cisco case study link: which design aims matter most in a port that stops if the network fails?</a:t>
             </a:r>
             <a:endParaRPr lang="en-US" dirty="0"/>
           </a:p>
@@ -2065,7 +2069,8 @@
               <a:rPr lang="en-US" dirty="0"/>
               <a:t>Appendix A needs users, groups and folder permissions with different access for others: students must work out their own numbers.
 Use the college policies pack (password, remote access, network security) as real examples of policy documents.
-Stretch: sticky bit and setgid for shared folders.</a:t>
+Stretch: sticky bit and setgid for shared folders.
+Video (lesson B3): Cisco Anatomy of an Attack (4 min). Discuss which password, access and audit controls would have stopped the attacker sooner.</a:t>
             </a:r>
             <a:endParaRPr lang="en-US" dirty="0"/>
           </a:p>
@@ -3234,7 +3239,8 @@
               <a:t>Teach: PAN, LAN, WLAN, MAN, WAN, SAN by scale and by who manages them. Emphasise the NEED: communicate, share data, share resources, collaborate.
 Question: why would a listed building choose a WLAN? Why does a hospital data centre use a SAN?
 Support: give students the types table on the Learn page (A1a). Stretch: add the cost and security implications of each choice.
-Workbook A1a. Practical: Lab 1 Packet Tracer tour. Homework: complete the NetAcad Packet Tracer short course.</a:t>
+Workbook A1a. Practical: Lab 1 Packet Tracer tour. Homework: complete the NetAcad Packet Tracer short course.
+Videos (site page 7, lesson A1a): Types of computer networks (LAN, MAN, WAN) and Internet vs intranet vs extranet.</a:t>
             </a:r>
             <a:endParaRPr lang="en-US" dirty="0"/>
           </a:p>
@@ -25713,7 +25719,7 @@
                 <a:ea typeface="Calibri" pitchFamily="34" charset="-122"/>
                 <a:cs typeface="Calibri" pitchFamily="34" charset="-120"/>
               </a:rPr>
-              <a:t>Link for Teams: nigeriastudentcenter.github.io/btech/unit19/start.html · No student accounts; work saves in the browser with download backups.</a:t>
+              <a:t>Plus 7. Videos: 11 embedded videos. Link for Teams: nigeriastudentcenter.github.io/btech/unit19/start.html · No accounts; work saves in the browser.</a:t>
             </a:r>
             <a:endParaRPr lang="en-US" sz="1000" dirty="0"/>
           </a:p>
